--- a/docs/weibo-vis/templates/20260910_人資_WEIBO新進員工簡報模板_v2.pptx
+++ b/docs/weibo-vis/templates/20260910_人資_WEIBO新進員工簡報模板_v2.pptx
@@ -2199,7 +2199,7 @@
         <p:spPr>
           <a:xfrm>
             <a:off x="548640" y="6035040"/>
-            <a:ext cx="1645920" cy="274320"/>
+            <a:ext cx="1179576" cy="274320"/>
           </a:xfrm>
           <a:prstGeom prst="rect">
             <a:avLst/>
@@ -4356,7 +4356,7 @@
         <p:spPr>
           <a:xfrm>
             <a:off x="548640" y="6035040"/>
-            <a:ext cx="1645920" cy="274320"/>
+            <a:ext cx="1179576" cy="274320"/>
           </a:xfrm>
           <a:prstGeom prst="rect">
             <a:avLst/>
@@ -5229,7 +5229,7 @@
         <p:spPr>
           <a:xfrm>
             <a:off x="548640" y="6035040"/>
-            <a:ext cx="1645920" cy="274320"/>
+            <a:ext cx="1179576" cy="274320"/>
           </a:xfrm>
           <a:prstGeom prst="rect">
             <a:avLst/>
@@ -6275,7 +6275,7 @@
         <p:spPr>
           <a:xfrm>
             <a:off x="548640" y="6035040"/>
-            <a:ext cx="1645920" cy="274320"/>
+            <a:ext cx="1179576" cy="274320"/>
           </a:xfrm>
           <a:prstGeom prst="rect">
             <a:avLst/>
@@ -7537,7 +7537,7 @@
         <p:spPr>
           <a:xfrm>
             <a:off x="548640" y="6035040"/>
-            <a:ext cx="1645920" cy="274320"/>
+            <a:ext cx="1179576" cy="274320"/>
           </a:xfrm>
           <a:prstGeom prst="rect">
             <a:avLst/>
@@ -9765,7 +9765,7 @@
         <p:spPr>
           <a:xfrm>
             <a:off x="548640" y="6035040"/>
-            <a:ext cx="1645920" cy="274320"/>
+            <a:ext cx="1179576" cy="274320"/>
           </a:xfrm>
           <a:prstGeom prst="rect">
             <a:avLst/>
@@ -11048,7 +11048,7 @@
         <p:spPr>
           <a:xfrm>
             <a:off x="548640" y="6035040"/>
-            <a:ext cx="1645920" cy="274320"/>
+            <a:ext cx="1179576" cy="274320"/>
           </a:xfrm>
           <a:prstGeom prst="rect">
             <a:avLst/>
@@ -12081,7 +12081,7 @@
         <p:spPr>
           <a:xfrm>
             <a:off x="548640" y="6035040"/>
-            <a:ext cx="1645920" cy="274320"/>
+            <a:ext cx="1179576" cy="274320"/>
           </a:xfrm>
           <a:prstGeom prst="rect">
             <a:avLst/>
@@ -13343,7 +13343,7 @@
         <p:spPr>
           <a:xfrm>
             <a:off x="548640" y="6035040"/>
-            <a:ext cx="1645920" cy="274320"/>
+            <a:ext cx="1179576" cy="274320"/>
           </a:xfrm>
           <a:prstGeom prst="rect">
             <a:avLst/>
